--- a/presentation .pptx
+++ b/presentation .pptx
@@ -56,24 +56,24 @@
     </p:embeddedFont>
     <p:embeddedFont>
       <p:font typeface="Inter" panose="02000503000000020004" pitchFamily="2" charset="0"/>
-      <p:regular r:id="rId39"/>
-      <p:bold r:id="rId40"/>
-      <p:italic r:id="rId41"/>
-      <p:boldItalic r:id="rId42"/>
+      <p:regular r:id=""/>
+      <p:bold r:id=""/>
+      <p:italic r:id=""/>
+      <p:boldItalic r:id=""/>
     </p:embeddedFont>
     <p:embeddedFont>
       <p:font typeface="Inter Light" panose="02000503000000020004" pitchFamily="2" charset="0"/>
-      <p:regular r:id="rId43"/>
-      <p:bold r:id="rId44"/>
-      <p:italic r:id="rId45"/>
-      <p:boldItalic r:id="rId46"/>
+      <p:regular r:id=""/>
+      <p:bold r:id=""/>
+      <p:italic r:id=""/>
+      <p:boldItalic r:id=""/>
     </p:embeddedFont>
     <p:embeddedFont>
       <p:font typeface="Inter Medium" panose="02000503000000020004" pitchFamily="2" charset="0"/>
-      <p:regular r:id="rId47"/>
-      <p:bold r:id="rId48"/>
-      <p:italic r:id="rId49"/>
-      <p:boldItalic r:id="rId50"/>
+      <p:regular r:id=""/>
+      <p:bold r:id=""/>
+      <p:italic r:id=""/>
+      <p:boldItalic r:id=""/>
     </p:embeddedFont>
   </p:embeddedFontLst>
   <p:defaultTextStyle>
@@ -7058,7 +7058,7 @@
         </p:nvSpPr>
         <p:spPr>
           <a:xfrm>
-            <a:off x="1028700" y="2272727"/>
+            <a:off x="583660" y="1927877"/>
             <a:ext cx="7086600" cy="689700"/>
           </a:xfrm>
           <a:prstGeom prst="rect">
@@ -7123,7 +7123,7 @@
         </p:nvSpPr>
         <p:spPr>
           <a:xfrm>
-            <a:off x="10172700" y="2272727"/>
+            <a:off x="10240421" y="1927877"/>
             <a:ext cx="7086600" cy="689700"/>
           </a:xfrm>
           <a:prstGeom prst="rect">
@@ -7194,7 +7194,7 @@
         </p:nvSpPr>
         <p:spPr>
           <a:xfrm>
-            <a:off x="2544932" y="4747721"/>
+            <a:off x="2099892" y="4402871"/>
             <a:ext cx="4782185" cy="646331"/>
           </a:xfrm>
           <a:prstGeom prst="rect">
@@ -7282,7 +7282,7 @@
         </p:nvSpPr>
         <p:spPr>
           <a:xfrm>
-            <a:off x="11488756" y="3552573"/>
+            <a:off x="11556477" y="3207723"/>
             <a:ext cx="4456729" cy="646331"/>
           </a:xfrm>
           <a:prstGeom prst="rect">
@@ -7352,7 +7352,7 @@
         </p:nvSpPr>
         <p:spPr>
           <a:xfrm>
-            <a:off x="2544932" y="3531908"/>
+            <a:off x="2099892" y="3187058"/>
             <a:ext cx="3685764" cy="646331"/>
           </a:xfrm>
           <a:prstGeom prst="rect">
@@ -7418,7 +7418,7 @@
         </p:nvSpPr>
         <p:spPr>
           <a:xfrm>
-            <a:off x="11488756" y="4626129"/>
+            <a:off x="11556477" y="4281279"/>
             <a:ext cx="4782185" cy="646331"/>
           </a:xfrm>
           <a:prstGeom prst="rect">
@@ -7510,7 +7510,7 @@
         </p:nvSpPr>
         <p:spPr>
           <a:xfrm>
-            <a:off x="11878235" y="4641518"/>
+            <a:off x="11945956" y="4296668"/>
             <a:ext cx="184731" cy="307777"/>
           </a:xfrm>
           <a:prstGeom prst="rect">
@@ -7546,7 +7546,7 @@
         </p:nvSpPr>
         <p:spPr>
           <a:xfrm>
-            <a:off x="2544932" y="7414108"/>
+            <a:off x="2099892" y="7069258"/>
             <a:ext cx="4782185" cy="1200329"/>
           </a:xfrm>
           <a:prstGeom prst="rect">
@@ -7634,7 +7634,7 @@
         </p:nvSpPr>
         <p:spPr>
           <a:xfrm>
-            <a:off x="2934411" y="5730463"/>
+            <a:off x="2489371" y="5385613"/>
             <a:ext cx="184731" cy="307777"/>
           </a:xfrm>
           <a:prstGeom prst="rect">
@@ -7666,7 +7666,7 @@
         </p:nvSpPr>
         <p:spPr>
           <a:xfrm>
-            <a:off x="11488756" y="5715074"/>
+            <a:off x="11556477" y="5370224"/>
             <a:ext cx="4782185" cy="1200329"/>
           </a:xfrm>
           <a:prstGeom prst="rect">
@@ -7758,7 +7758,7 @@
         </p:nvSpPr>
         <p:spPr>
           <a:xfrm>
-            <a:off x="11878235" y="5730463"/>
+            <a:off x="11945956" y="5385613"/>
             <a:ext cx="184731" cy="307777"/>
           </a:xfrm>
           <a:prstGeom prst="rect">
@@ -7790,7 +7790,7 @@
         </p:nvSpPr>
         <p:spPr>
           <a:xfrm>
-            <a:off x="2544932" y="5803915"/>
+            <a:off x="2099892" y="5459065"/>
             <a:ext cx="4782185" cy="1200329"/>
           </a:xfrm>
           <a:prstGeom prst="rect">
@@ -7878,7 +7878,7 @@
         </p:nvSpPr>
         <p:spPr>
           <a:xfrm>
-            <a:off x="3086811" y="5882863"/>
+            <a:off x="2641771" y="5538013"/>
             <a:ext cx="184731" cy="307777"/>
           </a:xfrm>
           <a:prstGeom prst="rect">
@@ -7910,7 +7910,7 @@
         </p:nvSpPr>
         <p:spPr>
           <a:xfrm>
-            <a:off x="11488756" y="7358017"/>
+            <a:off x="11556477" y="7013167"/>
             <a:ext cx="4782185" cy="1200329"/>
           </a:xfrm>
           <a:prstGeom prst="rect">
@@ -8002,7 +8002,7 @@
         </p:nvSpPr>
         <p:spPr>
           <a:xfrm>
-            <a:off x="11878235" y="7373406"/>
+            <a:off x="11945956" y="7028556"/>
             <a:ext cx="184731" cy="307777"/>
           </a:xfrm>
           <a:prstGeom prst="rect">
@@ -10793,8 +10793,8 @@
         </p:nvSpPr>
         <p:spPr>
           <a:xfrm>
-            <a:off x="1028700" y="1216123"/>
-            <a:ext cx="6886426" cy="2708177"/>
+            <a:off x="995449" y="767236"/>
+            <a:ext cx="6070369" cy="2708177"/>
           </a:xfrm>
           <a:prstGeom prst="rect">
             <a:avLst/>
@@ -11340,7 +11340,7 @@
         </p:nvSpPr>
         <p:spPr>
           <a:xfrm>
-            <a:off x="5600700" y="425266"/>
+            <a:off x="5374395" y="269973"/>
             <a:ext cx="7086600" cy="689420"/>
           </a:xfrm>
           <a:prstGeom prst="rect">
@@ -13031,112 +13031,6 @@
           <a:chExt cx="0" cy="0"/>
         </a:xfrm>
       </p:grpSpPr>
-      <p:sp>
-        <p:nvSpPr>
-          <p:cNvPr id="155" name="Google Shape;155;p17"/>
-          <p:cNvSpPr txBox="1"/>
-          <p:nvPr/>
-        </p:nvSpPr>
-        <p:spPr>
-          <a:xfrm>
-            <a:off x="1028700" y="424225"/>
-            <a:ext cx="1455900" cy="184800"/>
-          </a:xfrm>
-          <a:prstGeom prst="rect">
-            <a:avLst/>
-          </a:prstGeom>
-          <a:noFill/>
-          <a:ln>
-            <a:noFill/>
-          </a:ln>
-        </p:spPr>
-        <p:txBody>
-          <a:bodyPr spcFirstLastPara="1" wrap="square" lIns="0" tIns="0" rIns="0" bIns="0" anchor="t" anchorCtr="0">
-            <a:spAutoFit/>
-          </a:bodyPr>
-          <a:lstStyle/>
-          <a:p>
-            <a:pPr marL="0" marR="0" lvl="0" indent="0" algn="l" rtl="0">
-              <a:lnSpc>
-                <a:spcPct val="139916"/>
-              </a:lnSpc>
-              <a:spcBef>
-                <a:spcPts val="0"/>
-              </a:spcBef>
-              <a:spcAft>
-                <a:spcPts val="0"/>
-              </a:spcAft>
-              <a:buNone/>
-            </a:pPr>
-            <a:r>
-              <a:rPr lang="en-US" sz="1200" b="1" i="0" u="none" strike="noStrike" cap="none">
-                <a:solidFill>
-                  <a:srgbClr val="FFFFFF"/>
-                </a:solidFill>
-                <a:latin typeface="Inter Medium"/>
-                <a:ea typeface="Inter Medium"/>
-                <a:cs typeface="Inter Medium"/>
-                <a:sym typeface="Inter Medium"/>
-              </a:rPr>
-              <a:t>SlidesCarnival</a:t>
-            </a:r>
-            <a:endParaRPr/>
-          </a:p>
-        </p:txBody>
-      </p:sp>
-      <p:sp>
-        <p:nvSpPr>
-          <p:cNvPr id="156" name="Google Shape;156;p17"/>
-          <p:cNvSpPr txBox="1"/>
-          <p:nvPr/>
-        </p:nvSpPr>
-        <p:spPr>
-          <a:xfrm>
-            <a:off x="8218950" y="424225"/>
-            <a:ext cx="1850100" cy="184800"/>
-          </a:xfrm>
-          <a:prstGeom prst="rect">
-            <a:avLst/>
-          </a:prstGeom>
-          <a:noFill/>
-          <a:ln>
-            <a:noFill/>
-          </a:ln>
-        </p:spPr>
-        <p:txBody>
-          <a:bodyPr spcFirstLastPara="1" wrap="square" lIns="0" tIns="0" rIns="0" bIns="0" anchor="t" anchorCtr="0">
-            <a:spAutoFit/>
-          </a:bodyPr>
-          <a:lstStyle/>
-          <a:p>
-            <a:pPr marL="0" marR="0" lvl="0" indent="0" algn="ctr" rtl="0">
-              <a:lnSpc>
-                <a:spcPct val="139916"/>
-              </a:lnSpc>
-              <a:spcBef>
-                <a:spcPts val="0"/>
-              </a:spcBef>
-              <a:spcAft>
-                <a:spcPts val="0"/>
-              </a:spcAft>
-              <a:buNone/>
-            </a:pPr>
-            <a:r>
-              <a:rPr lang="en-US" sz="1200" b="1" i="0" u="none" strike="noStrike" cap="none">
-                <a:solidFill>
-                  <a:srgbClr val="FFFFFF"/>
-                </a:solidFill>
-                <a:latin typeface="Inter Medium"/>
-                <a:ea typeface="Inter Medium"/>
-                <a:cs typeface="Inter Medium"/>
-                <a:sym typeface="Inter Medium"/>
-              </a:rPr>
-              <a:t>Dark Minimalist</a:t>
-            </a:r>
-            <a:endParaRPr/>
-          </a:p>
-        </p:txBody>
-      </p:sp>
       <p:grpSp>
         <p:nvGrpSpPr>
           <p:cNvPr id="143" name="Google Shape;143;p17"/>
@@ -13246,59 +13140,6 @@
           </p:txBody>
         </p:sp>
       </p:grpSp>
-      <p:sp>
-        <p:nvSpPr>
-          <p:cNvPr id="157" name="Google Shape;157;p17"/>
-          <p:cNvSpPr txBox="1"/>
-          <p:nvPr/>
-        </p:nvSpPr>
-        <p:spPr>
-          <a:xfrm>
-            <a:off x="16062550" y="424225"/>
-            <a:ext cx="1196700" cy="184800"/>
-          </a:xfrm>
-          <a:prstGeom prst="rect">
-            <a:avLst/>
-          </a:prstGeom>
-          <a:noFill/>
-          <a:ln>
-            <a:noFill/>
-          </a:ln>
-        </p:spPr>
-        <p:txBody>
-          <a:bodyPr spcFirstLastPara="1" wrap="square" lIns="0" tIns="0" rIns="0" bIns="0" anchor="t" anchorCtr="0">
-            <a:spAutoFit/>
-          </a:bodyPr>
-          <a:lstStyle/>
-          <a:p>
-            <a:pPr marL="0" marR="0" lvl="0" indent="0" algn="r" rtl="0">
-              <a:lnSpc>
-                <a:spcPct val="139916"/>
-              </a:lnSpc>
-              <a:spcBef>
-                <a:spcPts val="0"/>
-              </a:spcBef>
-              <a:spcAft>
-                <a:spcPts val="0"/>
-              </a:spcAft>
-              <a:buNone/>
-            </a:pPr>
-            <a:r>
-              <a:rPr lang="en-US" sz="1200" b="1" i="0" u="none" strike="noStrike" cap="none">
-                <a:solidFill>
-                  <a:srgbClr val="FFFFFF"/>
-                </a:solidFill>
-                <a:latin typeface="Inter Medium"/>
-                <a:ea typeface="Inter Medium"/>
-                <a:cs typeface="Inter Medium"/>
-                <a:sym typeface="Inter Medium"/>
-              </a:rPr>
-              <a:t>08/12/2024</a:t>
-            </a:r>
-            <a:endParaRPr/>
-          </a:p>
-        </p:txBody>
-      </p:sp>
       <p:grpSp>
         <p:nvGrpSpPr>
           <p:cNvPr id="2" name="Google Shape;143;p17">
@@ -14184,165 +14025,6 @@
               <a:t>DragonNet</a:t>
             </a:r>
             <a:endParaRPr dirty="0"/>
-          </a:p>
-        </p:txBody>
-      </p:sp>
-      <p:sp>
-        <p:nvSpPr>
-          <p:cNvPr id="122" name="Google Shape;122;p15"/>
-          <p:cNvSpPr txBox="1"/>
-          <p:nvPr/>
-        </p:nvSpPr>
-        <p:spPr>
-          <a:xfrm>
-            <a:off x="1028700" y="424225"/>
-            <a:ext cx="1347000" cy="184800"/>
-          </a:xfrm>
-          <a:prstGeom prst="rect">
-            <a:avLst/>
-          </a:prstGeom>
-          <a:noFill/>
-          <a:ln>
-            <a:noFill/>
-          </a:ln>
-        </p:spPr>
-        <p:txBody>
-          <a:bodyPr spcFirstLastPara="1" wrap="square" lIns="0" tIns="0" rIns="0" bIns="0" anchor="t" anchorCtr="0">
-            <a:spAutoFit/>
-          </a:bodyPr>
-          <a:lstStyle/>
-          <a:p>
-            <a:pPr marL="0" marR="0" lvl="0" indent="0" algn="l" rtl="0">
-              <a:lnSpc>
-                <a:spcPct val="139916"/>
-              </a:lnSpc>
-              <a:spcBef>
-                <a:spcPts val="0"/>
-              </a:spcBef>
-              <a:spcAft>
-                <a:spcPts val="0"/>
-              </a:spcAft>
-              <a:buNone/>
-            </a:pPr>
-            <a:r>
-              <a:rPr lang="en-US" sz="1200" b="1" i="0" u="none" strike="noStrike" cap="none">
-                <a:solidFill>
-                  <a:srgbClr val="FFFFFF"/>
-                </a:solidFill>
-                <a:latin typeface="Inter Medium"/>
-                <a:ea typeface="Inter Medium"/>
-                <a:cs typeface="Inter Medium"/>
-                <a:sym typeface="Inter Medium"/>
-              </a:rPr>
-              <a:t>SlidesCarnival</a:t>
-            </a:r>
-            <a:endParaRPr/>
-          </a:p>
-        </p:txBody>
-      </p:sp>
-      <p:sp>
-        <p:nvSpPr>
-          <p:cNvPr id="123" name="Google Shape;123;p15"/>
-          <p:cNvSpPr txBox="1"/>
-          <p:nvPr/>
-        </p:nvSpPr>
-        <p:spPr>
-          <a:xfrm>
-            <a:off x="8022799" y="424225"/>
-            <a:ext cx="2242500" cy="184800"/>
-          </a:xfrm>
-          <a:prstGeom prst="rect">
-            <a:avLst/>
-          </a:prstGeom>
-          <a:noFill/>
-          <a:ln>
-            <a:noFill/>
-          </a:ln>
-        </p:spPr>
-        <p:txBody>
-          <a:bodyPr spcFirstLastPara="1" wrap="square" lIns="0" tIns="0" rIns="0" bIns="0" anchor="t" anchorCtr="0">
-            <a:spAutoFit/>
-          </a:bodyPr>
-          <a:lstStyle/>
-          <a:p>
-            <a:pPr marL="0" marR="0" lvl="0" indent="0" algn="ctr" rtl="0">
-              <a:lnSpc>
-                <a:spcPct val="139916"/>
-              </a:lnSpc>
-              <a:spcBef>
-                <a:spcPts val="0"/>
-              </a:spcBef>
-              <a:spcAft>
-                <a:spcPts val="0"/>
-              </a:spcAft>
-              <a:buNone/>
-            </a:pPr>
-            <a:r>
-              <a:rPr lang="en-US" sz="1200" b="1" i="0" u="none" strike="noStrike" cap="none">
-                <a:solidFill>
-                  <a:srgbClr val="FFFFFF"/>
-                </a:solidFill>
-                <a:latin typeface="Inter Medium"/>
-                <a:ea typeface="Inter Medium"/>
-                <a:cs typeface="Inter Medium"/>
-                <a:sym typeface="Inter Medium"/>
-              </a:rPr>
-              <a:t>Dark Minimalist</a:t>
-            </a:r>
-            <a:endParaRPr/>
-          </a:p>
-        </p:txBody>
-      </p:sp>
-      <p:sp>
-        <p:nvSpPr>
-          <p:cNvPr id="124" name="Google Shape;124;p15"/>
-          <p:cNvSpPr txBox="1"/>
-          <p:nvPr/>
-        </p:nvSpPr>
-        <p:spPr>
-          <a:xfrm>
-            <a:off x="16062550" y="424225"/>
-            <a:ext cx="1196700" cy="184800"/>
-          </a:xfrm>
-          <a:prstGeom prst="rect">
-            <a:avLst/>
-          </a:prstGeom>
-          <a:noFill/>
-          <a:ln>
-            <a:noFill/>
-          </a:ln>
-        </p:spPr>
-        <p:txBody>
-          <a:bodyPr spcFirstLastPara="1" wrap="square" lIns="0" tIns="0" rIns="0" bIns="0" anchor="t" anchorCtr="0">
-            <a:spAutoFit/>
-          </a:bodyPr>
-          <a:lstStyle/>
-          <a:p>
-            <a:pPr marL="0" marR="0" lvl="0" indent="0" algn="r" rtl="0">
-              <a:lnSpc>
-                <a:spcPct val="139916"/>
-              </a:lnSpc>
-              <a:spcBef>
-                <a:spcPts val="0"/>
-              </a:spcBef>
-              <a:spcAft>
-                <a:spcPts val="0"/>
-              </a:spcAft>
-              <a:buNone/>
-            </a:pPr>
-            <a:r>
-              <a:rPr lang="en-US" sz="1200" b="1" i="0" u="none" strike="noStrike" cap="none">
-                <a:solidFill>
-                  <a:srgbClr val="FFFFFF"/>
-                </a:solidFill>
-                <a:latin typeface="Inter Medium"/>
-                <a:ea typeface="Inter Medium"/>
-                <a:cs typeface="Inter Medium"/>
-                <a:sym typeface="Inter Medium"/>
-              </a:rPr>
-              <a:t>08/12/2024</a:t>
-            </a:r>
-            <a:endParaRPr/>
           </a:p>
         </p:txBody>
       </p:sp>
@@ -15283,7 +14965,7 @@
         </p:nvSpPr>
         <p:spPr>
           <a:xfrm>
-            <a:off x="5742000" y="7009987"/>
+            <a:off x="5143484" y="7009987"/>
             <a:ext cx="11119536" cy="2585323"/>
           </a:xfrm>
           <a:prstGeom prst="rect">
@@ -15927,327 +15609,6 @@
       </p:sp>
       <p:grpSp>
         <p:nvGrpSpPr>
-          <p:cNvPr id="5" name="Google Shape;143;p17">
-            <a:extLst>
-              <a:ext uri="{FF2B5EF4-FFF2-40B4-BE49-F238E27FC236}">
-                <a16:creationId xmlns:a16="http://schemas.microsoft.com/office/drawing/2014/main" id="{0EFA6C36-285F-DCE7-5F17-BCA0B1AC8447}"/>
-              </a:ext>
-            </a:extLst>
-          </p:cNvPr>
-          <p:cNvGrpSpPr/>
-          <p:nvPr/>
-        </p:nvGrpSpPr>
-        <p:grpSpPr>
-          <a:xfrm>
-            <a:off x="1222122" y="3273741"/>
-            <a:ext cx="3311319" cy="1534471"/>
-            <a:chOff x="-3" y="-1149839"/>
-            <a:chExt cx="9305403" cy="2081410"/>
-          </a:xfrm>
-        </p:grpSpPr>
-        <p:sp>
-          <p:nvSpPr>
-            <p:cNvPr id="6" name="Google Shape;144;p17">
-              <a:extLst>
-                <a:ext uri="{FF2B5EF4-FFF2-40B4-BE49-F238E27FC236}">
-                  <a16:creationId xmlns:a16="http://schemas.microsoft.com/office/drawing/2014/main" id="{E8284AA3-489F-A18E-42FD-ADE35F9DD6E8}"/>
-                </a:ext>
-              </a:extLst>
-            </p:cNvPr>
-            <p:cNvSpPr txBox="1"/>
-            <p:nvPr/>
-          </p:nvSpPr>
-          <p:spPr>
-            <a:xfrm>
-              <a:off x="-3" y="-1149839"/>
-              <a:ext cx="9305386" cy="1001950"/>
-            </a:xfrm>
-            <a:prstGeom prst="rect">
-              <a:avLst/>
-            </a:prstGeom>
-            <a:noFill/>
-            <a:ln>
-              <a:noFill/>
-            </a:ln>
-          </p:spPr>
-          <p:txBody>
-            <a:bodyPr spcFirstLastPara="1" wrap="square" lIns="0" tIns="0" rIns="0" bIns="0" anchor="t" anchorCtr="0">
-              <a:spAutoFit/>
-            </a:bodyPr>
-            <a:lstStyle/>
-            <a:p>
-              <a:pPr marL="0" marR="0" lvl="0" indent="0" algn="l" rtl="0">
-                <a:lnSpc>
-                  <a:spcPct val="100000"/>
-                </a:lnSpc>
-                <a:spcBef>
-                  <a:spcPts val="0"/>
-                </a:spcBef>
-                <a:spcAft>
-                  <a:spcPts val="0"/>
-                </a:spcAft>
-                <a:buNone/>
-              </a:pPr>
-              <a:r>
-                <a:rPr lang="en-US" sz="4800" b="0" i="0" u="none" strike="noStrike" cap="none" dirty="0">
-                  <a:solidFill>
-                    <a:srgbClr val="C2D076"/>
-                  </a:solidFill>
-                  <a:latin typeface="Inter"/>
-                  <a:ea typeface="Inter"/>
-                  <a:cs typeface="Inter"/>
-                  <a:sym typeface="Inter"/>
-                </a:rPr>
-                <a:t>DR Learner</a:t>
-              </a:r>
-              <a:endParaRPr sz="4800" dirty="0"/>
-            </a:p>
-          </p:txBody>
-        </p:sp>
-        <p:sp>
-          <p:nvSpPr>
-            <p:cNvPr id="7" name="Google Shape;145;p17">
-              <a:extLst>
-                <a:ext uri="{FF2B5EF4-FFF2-40B4-BE49-F238E27FC236}">
-                  <a16:creationId xmlns:a16="http://schemas.microsoft.com/office/drawing/2014/main" id="{1E306B3E-94D0-01C7-E5E4-238EC8557834}"/>
-                </a:ext>
-              </a:extLst>
-            </p:cNvPr>
-            <p:cNvSpPr txBox="1"/>
-            <p:nvPr/>
-          </p:nvSpPr>
-          <p:spPr>
-            <a:xfrm>
-              <a:off x="0" y="644313"/>
-              <a:ext cx="9305400" cy="287258"/>
-            </a:xfrm>
-            <a:prstGeom prst="rect">
-              <a:avLst/>
-            </a:prstGeom>
-            <a:noFill/>
-            <a:ln>
-              <a:noFill/>
-            </a:ln>
-          </p:spPr>
-          <p:txBody>
-            <a:bodyPr spcFirstLastPara="1" wrap="square" lIns="0" tIns="0" rIns="0" bIns="0" anchor="t" anchorCtr="0">
-              <a:spAutoFit/>
-            </a:bodyPr>
-            <a:lstStyle/>
-            <a:p>
-              <a:pPr marL="0" marR="0" lvl="0" indent="0" algn="l" rtl="0">
-                <a:lnSpc>
-                  <a:spcPct val="100000"/>
-                </a:lnSpc>
-                <a:spcBef>
-                  <a:spcPts val="0"/>
-                </a:spcBef>
-                <a:spcAft>
-                  <a:spcPts val="0"/>
-                </a:spcAft>
-                <a:buNone/>
-              </a:pPr>
-              <a:endParaRPr dirty="0"/>
-            </a:p>
-          </p:txBody>
-        </p:sp>
-      </p:grpSp>
-      <p:cxnSp>
-        <p:nvCxnSpPr>
-          <p:cNvPr id="9" name="Google Shape;208;p21">
-            <a:extLst>
-              <a:ext uri="{FF2B5EF4-FFF2-40B4-BE49-F238E27FC236}">
-                <a16:creationId xmlns:a16="http://schemas.microsoft.com/office/drawing/2014/main" id="{5C0E2412-55D1-D776-6C06-F29B3530F297}"/>
-              </a:ext>
-            </a:extLst>
-          </p:cNvPr>
-          <p:cNvCxnSpPr>
-            <a:cxnSpLocks/>
-          </p:cNvCxnSpPr>
-          <p:nvPr/>
-        </p:nvCxnSpPr>
-        <p:spPr>
-          <a:xfrm flipV="1">
-            <a:off x="6017979" y="3273741"/>
-            <a:ext cx="0" cy="6325218"/>
-          </a:xfrm>
-          <a:prstGeom prst="straightConnector1">
-            <a:avLst/>
-          </a:prstGeom>
-          <a:noFill/>
-          <a:ln w="9525" cap="flat" cmpd="sng">
-            <a:solidFill>
-              <a:srgbClr val="C2D076"/>
-            </a:solidFill>
-            <a:prstDash val="solid"/>
-            <a:round/>
-            <a:headEnd type="none" w="sm" len="sm"/>
-            <a:tailEnd type="none" w="sm" len="sm"/>
-          </a:ln>
-        </p:spPr>
-      </p:cxnSp>
-      <p:sp>
-        <p:nvSpPr>
-          <p:cNvPr id="10" name="Google Shape;179;p19">
-            <a:extLst>
-              <a:ext uri="{FF2B5EF4-FFF2-40B4-BE49-F238E27FC236}">
-                <a16:creationId xmlns:a16="http://schemas.microsoft.com/office/drawing/2014/main" id="{5CB4F01F-DD3D-0077-219A-C37C2DB06844}"/>
-              </a:ext>
-            </a:extLst>
-          </p:cNvPr>
-          <p:cNvSpPr txBox="1"/>
-          <p:nvPr/>
-        </p:nvSpPr>
-        <p:spPr>
-          <a:xfrm>
-            <a:off x="487155" y="5174355"/>
-            <a:ext cx="4781246" cy="2708434"/>
-          </a:xfrm>
-          <a:prstGeom prst="rect">
-            <a:avLst/>
-          </a:prstGeom>
-          <a:noFill/>
-          <a:ln>
-            <a:noFill/>
-          </a:ln>
-        </p:spPr>
-        <p:txBody>
-          <a:bodyPr spcFirstLastPara="1" wrap="square" lIns="0" tIns="0" rIns="0" bIns="0" anchor="t" anchorCtr="0">
-            <a:spAutoFit/>
-          </a:bodyPr>
-          <a:lstStyle/>
-          <a:p>
-            <a:pPr marL="0" marR="0" lvl="0" indent="0" rtl="0">
-              <a:lnSpc>
-                <a:spcPct val="100000"/>
-              </a:lnSpc>
-              <a:spcBef>
-                <a:spcPts val="0"/>
-              </a:spcBef>
-              <a:spcAft>
-                <a:spcPts val="0"/>
-              </a:spcAft>
-              <a:buNone/>
-            </a:pPr>
-            <a:r>
-              <a:rPr lang="en-US" sz="4400" dirty="0">
-                <a:solidFill>
-                  <a:srgbClr val="FFFFFF"/>
-                </a:solidFill>
-                <a:latin typeface="Inter Light"/>
-                <a:ea typeface="Inter Light"/>
-                <a:sym typeface="Inter Light"/>
-              </a:rPr>
-              <a:t>-Meta </a:t>
-            </a:r>
-            <a:r>
-              <a:rPr lang="en-US" sz="4400" dirty="0" err="1">
-                <a:solidFill>
-                  <a:srgbClr val="FFFFFF"/>
-                </a:solidFill>
-                <a:latin typeface="Inter Light"/>
-                <a:ea typeface="Inter Light"/>
-                <a:sym typeface="Inter Light"/>
-              </a:rPr>
-              <a:t>Algoritmo</a:t>
-            </a:r>
-            <a:endParaRPr lang="en-US" sz="4400" dirty="0">
-              <a:solidFill>
-                <a:srgbClr val="FFFFFF"/>
-              </a:solidFill>
-              <a:latin typeface="Inter Light"/>
-              <a:ea typeface="Inter Light"/>
-              <a:sym typeface="Inter Light"/>
-            </a:endParaRPr>
-          </a:p>
-          <a:p>
-            <a:pPr marL="0" marR="0" lvl="0" indent="0" rtl="0">
-              <a:lnSpc>
-                <a:spcPct val="100000"/>
-              </a:lnSpc>
-              <a:spcBef>
-                <a:spcPts val="0"/>
-              </a:spcBef>
-              <a:spcAft>
-                <a:spcPts val="0"/>
-              </a:spcAft>
-              <a:buNone/>
-            </a:pPr>
-            <a:r>
-              <a:rPr lang="en-US" sz="4400" dirty="0" err="1">
-                <a:solidFill>
-                  <a:srgbClr val="FFFFFF"/>
-                </a:solidFill>
-                <a:latin typeface="Inter Light"/>
-                <a:ea typeface="Inter Light"/>
-                <a:sym typeface="Inter Light"/>
-              </a:rPr>
-              <a:t>Calcolo</a:t>
-            </a:r>
-            <a:r>
-              <a:rPr lang="en-US" sz="4400" dirty="0">
-                <a:solidFill>
-                  <a:srgbClr val="FFFFFF"/>
-                </a:solidFill>
-                <a:latin typeface="Inter Light"/>
-                <a:ea typeface="Inter Light"/>
-                <a:sym typeface="Inter Light"/>
-              </a:rPr>
-              <a:t> del:</a:t>
-            </a:r>
-          </a:p>
-          <a:p>
-            <a:pPr marR="0" lvl="0" rtl="0">
-              <a:lnSpc>
-                <a:spcPct val="100000"/>
-              </a:lnSpc>
-              <a:spcBef>
-                <a:spcPts val="0"/>
-              </a:spcBef>
-              <a:spcAft>
-                <a:spcPts val="0"/>
-              </a:spcAft>
-            </a:pPr>
-            <a:r>
-              <a:rPr lang="en-US" sz="4400" dirty="0">
-                <a:solidFill>
-                  <a:srgbClr val="FFFFFF"/>
-                </a:solidFill>
-                <a:latin typeface="Inter Light"/>
-                <a:ea typeface="Inter Light"/>
-                <a:sym typeface="Inter Light"/>
-              </a:rPr>
-              <a:t>-Propensity Score</a:t>
-            </a:r>
-          </a:p>
-          <a:p>
-            <a:pPr marR="0" lvl="0" rtl="0">
-              <a:lnSpc>
-                <a:spcPct val="100000"/>
-              </a:lnSpc>
-              <a:spcBef>
-                <a:spcPts val="0"/>
-              </a:spcBef>
-              <a:spcAft>
-                <a:spcPts val="0"/>
-              </a:spcAft>
-            </a:pPr>
-            <a:r>
-              <a:rPr lang="en-US" sz="4400" dirty="0">
-                <a:solidFill>
-                  <a:srgbClr val="FFFFFF"/>
-                </a:solidFill>
-                <a:latin typeface="Inter Light"/>
-                <a:ea typeface="Inter Light"/>
-                <a:sym typeface="Inter Light"/>
-              </a:rPr>
-              <a:t>-Outcome Model</a:t>
-            </a:r>
-          </a:p>
-        </p:txBody>
-      </p:sp>
-      <p:grpSp>
-        <p:nvGrpSpPr>
           <p:cNvPr id="13" name="Google Shape;143;p17">
             <a:extLst>
               <a:ext uri="{FF2B5EF4-FFF2-40B4-BE49-F238E27FC236}">
@@ -16260,7 +15621,7 @@
         </p:nvGrpSpPr>
         <p:grpSpPr>
           <a:xfrm>
-            <a:off x="10681747" y="3273741"/>
+            <a:off x="7772293" y="3453125"/>
             <a:ext cx="3311319" cy="1534471"/>
             <a:chOff x="-3" y="-1149839"/>
             <a:chExt cx="9305403" cy="2081410"/>
@@ -16387,8 +15748,8 @@
         </p:nvSpPr>
         <p:spPr>
           <a:xfrm>
-            <a:off x="7198684" y="4816646"/>
-            <a:ext cx="10142675" cy="3385542"/>
+            <a:off x="4289230" y="4996030"/>
+            <a:ext cx="10142675" cy="2708434"/>
           </a:xfrm>
           <a:prstGeom prst="rect">
             <a:avLst/>
@@ -16629,7 +15990,7 @@
               <a:t>-</a:t>
             </a:r>
             <a:r>
-              <a:rPr lang="en-US" sz="4400" dirty="0" err="1">
+              <a:rPr lang="en-US" sz="4400" b="1" dirty="0" err="1">
                 <a:solidFill>
                   <a:srgbClr val="FFFFFF"/>
                 </a:solidFill>
@@ -16691,75 +16052,6 @@
               <a:ea typeface="Inter Light"/>
               <a:sym typeface="Inter Light"/>
             </a:endParaRPr>
-          </a:p>
-          <a:p>
-            <a:pPr marL="0" marR="0" lvl="0" indent="0" rtl="0">
-              <a:lnSpc>
-                <a:spcPct val="100000"/>
-              </a:lnSpc>
-              <a:spcBef>
-                <a:spcPts val="0"/>
-              </a:spcBef>
-              <a:spcAft>
-                <a:spcPts val="0"/>
-              </a:spcAft>
-              <a:buNone/>
-            </a:pPr>
-            <a:r>
-              <a:rPr lang="en-US" sz="4400" dirty="0">
-                <a:solidFill>
-                  <a:srgbClr val="FFFFFF"/>
-                </a:solidFill>
-                <a:latin typeface="Inter Light"/>
-                <a:ea typeface="Inter Light"/>
-                <a:sym typeface="Inter Light"/>
-              </a:rPr>
-              <a:t>-</a:t>
-            </a:r>
-            <a:r>
-              <a:rPr lang="en-US" sz="4400" dirty="0" err="1">
-                <a:solidFill>
-                  <a:srgbClr val="FFFFFF"/>
-                </a:solidFill>
-                <a:latin typeface="Inter Light"/>
-                <a:ea typeface="Inter Light"/>
-                <a:sym typeface="Inter Light"/>
-              </a:rPr>
-              <a:t>regolarizzazione</a:t>
-            </a:r>
-            <a:r>
-              <a:rPr lang="en-US" sz="4400" dirty="0">
-                <a:solidFill>
-                  <a:srgbClr val="FFFFFF"/>
-                </a:solidFill>
-                <a:latin typeface="Inter Light"/>
-                <a:ea typeface="Inter Light"/>
-                <a:sym typeface="Inter Light"/>
-              </a:rPr>
-              <a:t>, </a:t>
-            </a:r>
-            <a:r>
-              <a:rPr lang="en-US" sz="4400" dirty="0" err="1">
-                <a:solidFill>
-                  <a:srgbClr val="FFFFFF"/>
-                </a:solidFill>
-                <a:latin typeface="Inter Light"/>
-                <a:ea typeface="Inter Light"/>
-                <a:sym typeface="Inter Light"/>
-              </a:rPr>
-              <a:t>previene</a:t>
-            </a:r>
-            <a:r>
-              <a:rPr lang="en-US" sz="4400" dirty="0">
-                <a:solidFill>
-                  <a:srgbClr val="FFFFFF"/>
-                </a:solidFill>
-                <a:latin typeface="Inter Light"/>
-                <a:ea typeface="Inter Light"/>
-                <a:sym typeface="Inter Light"/>
-              </a:rPr>
-              <a:t> overfitting</a:t>
-            </a:r>
           </a:p>
         </p:txBody>
       </p:sp>
@@ -18299,7 +17591,7 @@
         </p:nvSpPr>
         <p:spPr>
           <a:xfrm>
-            <a:off x="1526084" y="2851804"/>
+            <a:off x="1526083" y="3850837"/>
             <a:ext cx="15235832" cy="1723549"/>
           </a:xfrm>
           <a:prstGeom prst="rect">
@@ -18426,8 +17718,8 @@
         </p:nvSpPr>
         <p:spPr>
           <a:xfrm>
-            <a:off x="1526084" y="5119347"/>
-            <a:ext cx="15005957" cy="861774"/>
+            <a:off x="1526083" y="7637619"/>
+            <a:ext cx="15005957" cy="1723549"/>
           </a:xfrm>
           <a:prstGeom prst="rect">
             <a:avLst/>
@@ -18494,6 +17786,18 @@
             <a:r>
               <a:rPr lang="en-US" sz="5600" dirty="0" err="1">
                 <a:solidFill>
+                  <a:srgbClr val="FF0000"/>
+                </a:solidFill>
+                <a:latin typeface="Inter"/>
+                <a:ea typeface="Inter"/>
+                <a:cs typeface="Inter"/>
+                <a:sym typeface="Inter"/>
+              </a:rPr>
+              <a:t>limitata</a:t>
+            </a:r>
+            <a:r>
+              <a:rPr lang="en-US" sz="5600" dirty="0">
+                <a:solidFill>
                   <a:srgbClr val="C2D076"/>
                 </a:solidFill>
                 <a:latin typeface="Inter"/>
@@ -18501,7 +17805,19 @@
                 <a:cs typeface="Inter"/>
                 <a:sym typeface="Inter"/>
               </a:rPr>
-              <a:t>limitata</a:t>
+              <a:t> (dataset DEMO), </a:t>
+            </a:r>
+            <a:r>
+              <a:rPr lang="en-US" sz="5600" dirty="0" err="1">
+                <a:solidFill>
+                  <a:srgbClr val="C2D076"/>
+                </a:solidFill>
+                <a:latin typeface="Inter"/>
+                <a:ea typeface="Inter"/>
+                <a:cs typeface="Inter"/>
+                <a:sym typeface="Inter"/>
+              </a:rPr>
+              <a:t>Instabilità</a:t>
             </a:r>
             <a:r>
               <a:rPr lang="en-US" sz="5600" dirty="0">
@@ -18513,7 +17829,55 @@
                 <a:cs typeface="Inter"/>
                 <a:sym typeface="Inter"/>
               </a:rPr>
-              <a:t> (dataset DEMO)</a:t>
+              <a:t> </a:t>
+            </a:r>
+            <a:r>
+              <a:rPr lang="en-US" sz="5600" dirty="0" err="1">
+                <a:solidFill>
+                  <a:srgbClr val="C2D076"/>
+                </a:solidFill>
+                <a:latin typeface="Inter"/>
+                <a:ea typeface="Inter"/>
+                <a:cs typeface="Inter"/>
+                <a:sym typeface="Inter"/>
+              </a:rPr>
+              <a:t>dei</a:t>
+            </a:r>
+            <a:r>
+              <a:rPr lang="en-US" sz="5600" dirty="0">
+                <a:solidFill>
+                  <a:srgbClr val="C2D076"/>
+                </a:solidFill>
+                <a:latin typeface="Inter"/>
+                <a:ea typeface="Inter"/>
+                <a:cs typeface="Inter"/>
+                <a:sym typeface="Inter"/>
+              </a:rPr>
+              <a:t> </a:t>
+            </a:r>
+            <a:r>
+              <a:rPr lang="en-US" sz="5600" dirty="0" err="1">
+                <a:solidFill>
+                  <a:srgbClr val="C2D076"/>
+                </a:solidFill>
+                <a:latin typeface="Inter"/>
+                <a:ea typeface="Inter"/>
+                <a:cs typeface="Inter"/>
+                <a:sym typeface="Inter"/>
+              </a:rPr>
+              <a:t>modelli</a:t>
+            </a:r>
+            <a:r>
+              <a:rPr lang="en-US" sz="5600" dirty="0">
+                <a:solidFill>
+                  <a:srgbClr val="C2D076"/>
+                </a:solidFill>
+                <a:latin typeface="Inter"/>
+                <a:ea typeface="Inter"/>
+                <a:cs typeface="Inter"/>
+                <a:sym typeface="Inter"/>
+              </a:rPr>
+              <a:t> DL</a:t>
             </a:r>
           </a:p>
         </p:txBody>
@@ -18532,8 +17896,8 @@
         </p:nvSpPr>
         <p:spPr>
           <a:xfrm>
-            <a:off x="1526083" y="6525115"/>
-            <a:ext cx="15005957" cy="1723549"/>
+            <a:off x="1526083" y="6175115"/>
+            <a:ext cx="15005957" cy="861774"/>
           </a:xfrm>
           <a:prstGeom prst="rect">
             <a:avLst/>
@@ -18583,7 +17947,7 @@
                 <a:cs typeface="Inter"/>
                 <a:sym typeface="Inter"/>
               </a:rPr>
-              <a:t>Assunzioni</a:t>
+              <a:t>Variabili</a:t>
             </a:r>
             <a:r>
               <a:rPr lang="en-US" sz="5600" dirty="0">
@@ -18595,7 +17959,7 @@
                 <a:cs typeface="Inter"/>
                 <a:sym typeface="Inter"/>
               </a:rPr>
-              <a:t> del TTE non </a:t>
+              <a:t> continue non </a:t>
             </a:r>
             <a:r>
               <a:rPr lang="en-US" sz="5600" dirty="0" err="1">
@@ -18607,8 +17971,63 @@
                 <a:cs typeface="Inter"/>
                 <a:sym typeface="Inter"/>
               </a:rPr>
-              <a:t>verificabili</a:t>
-            </a:r>
+              <a:t>misurate</a:t>
+            </a:r>
+            <a:endParaRPr lang="en-US" sz="5600" dirty="0">
+              <a:solidFill>
+                <a:srgbClr val="FF0000"/>
+              </a:solidFill>
+              <a:latin typeface="Inter"/>
+              <a:ea typeface="Inter"/>
+              <a:cs typeface="Inter"/>
+              <a:sym typeface="Inter"/>
+            </a:endParaRPr>
+          </a:p>
+        </p:txBody>
+      </p:sp>
+      <p:sp>
+        <p:nvSpPr>
+          <p:cNvPr id="2" name="Google Shape;68;p11">
+            <a:extLst>
+              <a:ext uri="{FF2B5EF4-FFF2-40B4-BE49-F238E27FC236}">
+                <a16:creationId xmlns:a16="http://schemas.microsoft.com/office/drawing/2014/main" id="{515952BF-1F00-4062-9F40-838F4DE33D57}"/>
+              </a:ext>
+            </a:extLst>
+          </p:cNvPr>
+          <p:cNvSpPr txBox="1"/>
+          <p:nvPr/>
+        </p:nvSpPr>
+        <p:spPr>
+          <a:xfrm>
+            <a:off x="1526084" y="1787606"/>
+            <a:ext cx="15235832" cy="1723549"/>
+          </a:xfrm>
+          <a:prstGeom prst="rect">
+            <a:avLst/>
+          </a:prstGeom>
+          <a:noFill/>
+          <a:ln>
+            <a:noFill/>
+          </a:ln>
+        </p:spPr>
+        <p:txBody>
+          <a:bodyPr spcFirstLastPara="1" wrap="square" lIns="0" tIns="0" rIns="0" bIns="0" anchor="t" anchorCtr="0">
+            <a:spAutoFit/>
+          </a:bodyPr>
+          <a:lstStyle/>
+          <a:p>
+            <a:pPr marL="0" marR="0" lvl="0" indent="0" rtl="0">
+              <a:lnSpc>
+                <a:spcPct val="100000"/>
+              </a:lnSpc>
+              <a:spcBef>
+                <a:spcPts val="0"/>
+              </a:spcBef>
+              <a:spcAft>
+                <a:spcPts val="0"/>
+              </a:spcAft>
+              <a:buNone/>
+            </a:pPr>
             <a:r>
               <a:rPr lang="en-US" sz="5600" dirty="0">
                 <a:solidFill>
@@ -18619,8 +18038,65 @@
                 <a:cs typeface="Inter"/>
                 <a:sym typeface="Inter"/>
               </a:rPr>
-              <a:t>: Exchangeability</a:t>
-            </a:r>
+              <a:t>-Assenza di </a:t>
+            </a:r>
+            <a:r>
+              <a:rPr lang="en-US" sz="5600" dirty="0" err="1">
+                <a:solidFill>
+                  <a:srgbClr val="C2D076"/>
+                </a:solidFill>
+                <a:latin typeface="Inter"/>
+                <a:ea typeface="Inter"/>
+                <a:cs typeface="Inter"/>
+                <a:sym typeface="Inter"/>
+              </a:rPr>
+              <a:t>significatività</a:t>
+            </a:r>
+            <a:r>
+              <a:rPr lang="en-US" sz="5600" dirty="0">
+                <a:solidFill>
+                  <a:srgbClr val="C2D076"/>
+                </a:solidFill>
+                <a:latin typeface="Inter"/>
+                <a:ea typeface="Inter"/>
+                <a:cs typeface="Inter"/>
+                <a:sym typeface="Inter"/>
+              </a:rPr>
+              <a:t>, ma con </a:t>
+            </a:r>
+            <a:r>
+              <a:rPr lang="en-US" sz="5600" b="1" dirty="0">
+                <a:solidFill>
+                  <a:srgbClr val="C2D076"/>
+                </a:solidFill>
+                <a:latin typeface="Inter"/>
+                <a:ea typeface="Inter"/>
+                <a:cs typeface="Inter"/>
+                <a:sym typeface="Inter"/>
+              </a:rPr>
+              <a:t>IC </a:t>
+            </a:r>
+            <a:r>
+              <a:rPr lang="en-US" sz="5600" dirty="0">
+                <a:solidFill>
+                  <a:srgbClr val="C2D076"/>
+                </a:solidFill>
+                <a:latin typeface="Inter"/>
+                <a:ea typeface="Inter"/>
+                <a:cs typeface="Inter"/>
+                <a:sym typeface="Inter"/>
+              </a:rPr>
+              <a:t>ristretto</a:t>
+            </a:r>
+            <a:endParaRPr lang="en-US" sz="5600" b="1" dirty="0">
+              <a:solidFill>
+                <a:srgbClr val="C2D076"/>
+              </a:solidFill>
+              <a:latin typeface="Inter"/>
+              <a:ea typeface="Inter"/>
+              <a:cs typeface="Inter"/>
+              <a:sym typeface="Inter"/>
+            </a:endParaRPr>
           </a:p>
         </p:txBody>
       </p:sp>
